--- a/rapports/septembre/Pour_de_Bon_sept2026.pptx
+++ b/rapports/septembre/Pour_de_Bon_sept2026.pptx
@@ -6235,7 +6235,7 @@
         <p:spPr>
           <a:xfrm>
             <a:off x="8296656" y="4389120"/>
-            <a:ext cx="2072640" cy="152400"/>
+            <a:ext cx="2225040" cy="152400"/>
           </a:xfrm>
           <a:prstGeom prst="rect">
             <a:avLst/>
@@ -6256,7 +6256,7 @@
                 </a:solidFill>
                 <a:latin typeface="Arial"/>
               </a:rPr>
-              <a:t>Produits frais</a:t>
+              <a:t>Viandes, volailles et charcuterie</a:t>
             </a:r>
           </a:p>
         </p:txBody>
@@ -6314,7 +6314,7 @@
         <p:spPr>
           <a:xfrm>
             <a:off x="8296656" y="4657344"/>
-            <a:ext cx="2072640" cy="152400"/>
+            <a:ext cx="2225040" cy="152400"/>
           </a:xfrm>
           <a:prstGeom prst="rect">
             <a:avLst/>
@@ -6329,13 +6329,13 @@
           <a:p>
             <a:pPr algn="l"/>
             <a:r>
-              <a:rPr sz="1000" b="0" i="0">
+              <a:rPr sz="800" b="0" i="0">
                 <a:solidFill>
                   <a:srgbClr val="111111"/>
                 </a:solidFill>
                 <a:latin typeface="Arial"/>
               </a:rPr>
-              <a:t>Épicerie salée · 33 %</a:t>
+              <a:t>Champagnes, vins et cadeaux · 22 %</a:t>
             </a:r>
           </a:p>
         </p:txBody>
@@ -6393,7 +6393,7 @@
         <p:spPr>
           <a:xfrm>
             <a:off x="8296656" y="4925568"/>
-            <a:ext cx="2072640" cy="152400"/>
+            <a:ext cx="2225040" cy="152400"/>
           </a:xfrm>
           <a:prstGeom prst="rect">
             <a:avLst/>
@@ -6408,13 +6408,13 @@
           <a:p>
             <a:pPr algn="l"/>
             <a:r>
-              <a:rPr sz="1000" b="0" i="0">
+              <a:rPr sz="800" b="0" i="0">
                 <a:solidFill>
                   <a:srgbClr val="111111"/>
                 </a:solidFill>
                 <a:latin typeface="Arial"/>
               </a:rPr>
-              <a:t>Boulangerie et sucré · 16 %</a:t>
+              <a:t>Poissons et produits de la mer · 21 %</a:t>
             </a:r>
           </a:p>
         </p:txBody>
@@ -6472,7 +6472,7 @@
         <p:spPr>
           <a:xfrm>
             <a:off x="8296656" y="5193792"/>
-            <a:ext cx="2072640" cy="152400"/>
+            <a:ext cx="2225040" cy="152400"/>
           </a:xfrm>
           <a:prstGeom prst="rect">
             <a:avLst/>
@@ -6487,13 +6487,13 @@
           <a:p>
             <a:pPr algn="l"/>
             <a:r>
-              <a:rPr sz="1000" b="0" i="0">
+              <a:rPr sz="800" b="0" i="0">
                 <a:solidFill>
                   <a:srgbClr val="111111"/>
                 </a:solidFill>
                 <a:latin typeface="Arial"/>
               </a:rPr>
-              <a:t>Plats préparés et autres · 9 %</a:t>
+              <a:t>Fromages et produits laitiers · 21 %</a:t>
             </a:r>
           </a:p>
         </p:txBody>
@@ -6506,8 +6506,166 @@
         </p:nvSpPr>
         <p:spPr>
           <a:xfrm>
+            <a:off x="8077200" y="5480304"/>
+            <a:ext cx="121920" cy="121920"/>
+          </a:xfrm>
+          <a:prstGeom prst="rect">
+            <a:avLst/>
+          </a:prstGeom>
+          <a:solidFill>
+            <a:srgbClr val="3E5A78"/>
+          </a:solidFill>
+          <a:ln>
+            <a:noFill/>
+          </a:ln>
+          <a:effectLst/>
+        </p:spPr>
+        <p:style>
+          <a:lnRef idx="1">
+            <a:schemeClr val="accent1"/>
+          </a:lnRef>
+          <a:fillRef idx="3">
+            <a:schemeClr val="accent1"/>
+          </a:fillRef>
+          <a:effectRef idx="2">
+            <a:schemeClr val="accent1"/>
+          </a:effectRef>
+          <a:fontRef idx="minor">
+            <a:schemeClr val="lt1"/>
+          </a:fontRef>
+        </p:style>
+        <p:txBody>
+          <a:bodyPr rtlCol="0" anchor="ctr"/>
+          <a:lstStyle/>
+          <a:p>
+            <a:pPr algn="ctr"/>
+          </a:p>
+        </p:txBody>
+      </p:sp>
+      <p:sp>
+        <p:nvSpPr>
+          <p:cNvPr id="89" name="TextBox 88"/>
+          <p:cNvSpPr txBox="1"/>
+          <p:nvPr/>
+        </p:nvSpPr>
+        <p:spPr>
+          <a:xfrm>
+            <a:off x="8296656" y="5462016"/>
+            <a:ext cx="2225040" cy="152400"/>
+          </a:xfrm>
+          <a:prstGeom prst="rect">
+            <a:avLst/>
+          </a:prstGeom>
+          <a:noFill/>
+        </p:spPr>
+        <p:txBody>
+          <a:bodyPr wrap="square" anchor="t" lIns="0" rIns="0" tIns="0" bIns="0">
+            <a:spAutoFit/>
+          </a:bodyPr>
+          <a:lstStyle/>
+          <a:p>
+            <a:pPr algn="l"/>
+            <a:r>
+              <a:rPr sz="1000" b="0" i="0">
+                <a:solidFill>
+                  <a:srgbClr val="111111"/>
+                </a:solidFill>
+                <a:latin typeface="Arial"/>
+              </a:rPr>
+              <a:t>Épicerie sucrée et miel · 4 %</a:t>
+            </a:r>
+          </a:p>
+        </p:txBody>
+      </p:sp>
+      <p:sp>
+        <p:nvSpPr>
+          <p:cNvPr id="90" name="Rectangle 89"/>
+          <p:cNvSpPr/>
+          <p:nvPr/>
+        </p:nvSpPr>
+        <p:spPr>
+          <a:xfrm>
+            <a:off x="8077200" y="5748528"/>
+            <a:ext cx="121920" cy="121920"/>
+          </a:xfrm>
+          <a:prstGeom prst="rect">
+            <a:avLst/>
+          </a:prstGeom>
+          <a:solidFill>
+            <a:srgbClr val="A09278"/>
+          </a:solidFill>
+          <a:ln>
+            <a:noFill/>
+          </a:ln>
+          <a:effectLst/>
+        </p:spPr>
+        <p:style>
+          <a:lnRef idx="1">
+            <a:schemeClr val="accent1"/>
+          </a:lnRef>
+          <a:fillRef idx="3">
+            <a:schemeClr val="accent1"/>
+          </a:fillRef>
+          <a:effectRef idx="2">
+            <a:schemeClr val="accent1"/>
+          </a:effectRef>
+          <a:fontRef idx="minor">
+            <a:schemeClr val="lt1"/>
+          </a:fontRef>
+        </p:style>
+        <p:txBody>
+          <a:bodyPr rtlCol="0" anchor="ctr"/>
+          <a:lstStyle/>
+          <a:p>
+            <a:pPr algn="ctr"/>
+          </a:p>
+        </p:txBody>
+      </p:sp>
+      <p:sp>
+        <p:nvSpPr>
+          <p:cNvPr id="91" name="TextBox 90"/>
+          <p:cNvSpPr txBox="1"/>
+          <p:nvPr/>
+        </p:nvSpPr>
+        <p:spPr>
+          <a:xfrm>
+            <a:off x="8296656" y="5730240"/>
+            <a:ext cx="2225040" cy="152400"/>
+          </a:xfrm>
+          <a:prstGeom prst="rect">
+            <a:avLst/>
+          </a:prstGeom>
+          <a:noFill/>
+        </p:spPr>
+        <p:txBody>
+          <a:bodyPr wrap="square" anchor="t" lIns="0" rIns="0" tIns="0" bIns="0">
+            <a:spAutoFit/>
+          </a:bodyPr>
+          <a:lstStyle/>
+          <a:p>
+            <a:pPr algn="l"/>
+            <a:r>
+              <a:rPr sz="800" b="0" i="0">
+                <a:solidFill>
+                  <a:srgbClr val="111111"/>
+                </a:solidFill>
+                <a:latin typeface="Arial"/>
+              </a:rPr>
+              <a:t>Plats préparés et spécialités · 3 %</a:t>
+            </a:r>
+          </a:p>
+        </p:txBody>
+      </p:sp>
+      <p:sp>
+        <p:nvSpPr>
+          <p:cNvPr id="92" name="Rectangle 91"/>
+          <p:cNvSpPr/>
+          <p:nvPr/>
+        </p:nvSpPr>
+        <p:spPr>
+          <a:xfrm>
             <a:off x="10564368" y="4450080"/>
-            <a:ext cx="475488" cy="563270"/>
+            <a:ext cx="475488" cy="388924"/>
           </a:xfrm>
           <a:prstGeom prst="rect">
             <a:avLst/>
@@ -6544,14 +6702,14 @@
       </p:sp>
       <p:sp>
         <p:nvSpPr>
-          <p:cNvPr id="89" name="TextBox 88"/>
+          <p:cNvPr id="93" name="TextBox 92"/>
           <p:cNvSpPr txBox="1"/>
           <p:nvPr/>
         </p:nvSpPr>
         <p:spPr>
           <a:xfrm>
             <a:off x="10564368" y="4450080"/>
-            <a:ext cx="475488" cy="563270"/>
+            <a:ext cx="475488" cy="388924"/>
           </a:xfrm>
           <a:prstGeom prst="rect">
             <a:avLst/>
@@ -6572,21 +6730,21 @@
                 </a:solidFill>
                 <a:latin typeface="Arial"/>
               </a:rPr>
-              <a:t>42 %</a:t>
-            </a:r>
-          </a:p>
-        </p:txBody>
-      </p:sp>
-      <p:sp>
-        <p:nvSpPr>
-          <p:cNvPr id="90" name="Rectangle 89"/>
+              <a:t>29 %</a:t>
+            </a:r>
+          </a:p>
+        </p:txBody>
+      </p:sp>
+      <p:sp>
+        <p:nvSpPr>
+          <p:cNvPr id="94" name="Rectangle 93"/>
           <p:cNvSpPr/>
           <p:nvPr/>
         </p:nvSpPr>
         <p:spPr>
           <a:xfrm>
-            <a:off x="10564368" y="5013350"/>
-            <a:ext cx="475488" cy="442569"/>
+            <a:off x="10564368" y="4839004"/>
+            <a:ext cx="475488" cy="295046"/>
           </a:xfrm>
           <a:prstGeom prst="rect">
             <a:avLst/>
@@ -6623,49 +6781,14 @@
       </p:sp>
       <p:sp>
         <p:nvSpPr>
-          <p:cNvPr id="91" name="TextBox 90"/>
-          <p:cNvSpPr txBox="1"/>
-          <p:nvPr/>
-        </p:nvSpPr>
-        <p:spPr>
-          <a:xfrm>
-            <a:off x="10564368" y="5013350"/>
-            <a:ext cx="475488" cy="442569"/>
-          </a:xfrm>
-          <a:prstGeom prst="rect">
-            <a:avLst/>
-          </a:prstGeom>
-          <a:noFill/>
-        </p:spPr>
-        <p:txBody>
-          <a:bodyPr wrap="square" anchor="ctr" lIns="0" rIns="0" tIns="0" bIns="0">
-            <a:spAutoFit/>
-          </a:bodyPr>
-          <a:lstStyle/>
-          <a:p>
-            <a:pPr algn="ctr"/>
-            <a:r>
-              <a:rPr sz="1000" b="1" i="0">
-                <a:solidFill>
-                  <a:srgbClr val="FFFFFF"/>
-                </a:solidFill>
-                <a:latin typeface="Arial"/>
-              </a:rPr>
-              <a:t>33 %</a:t>
-            </a:r>
-          </a:p>
-        </p:txBody>
-      </p:sp>
-      <p:sp>
-        <p:nvSpPr>
-          <p:cNvPr id="92" name="Rectangle 91"/>
+          <p:cNvPr id="95" name="Rectangle 94"/>
           <p:cNvSpPr/>
           <p:nvPr/>
         </p:nvSpPr>
         <p:spPr>
           <a:xfrm>
-            <a:off x="10564368" y="5455920"/>
-            <a:ext cx="475488" cy="214579"/>
+            <a:off x="10564368" y="5134051"/>
+            <a:ext cx="475488" cy="281635"/>
           </a:xfrm>
           <a:prstGeom prst="rect">
             <a:avLst/>
@@ -6702,20 +6825,108 @@
       </p:sp>
       <p:sp>
         <p:nvSpPr>
-          <p:cNvPr id="93" name="Rectangle 92"/>
+          <p:cNvPr id="96" name="Rectangle 95"/>
           <p:cNvSpPr/>
           <p:nvPr/>
         </p:nvSpPr>
         <p:spPr>
           <a:xfrm>
-            <a:off x="10564368" y="5670499"/>
-            <a:ext cx="475488" cy="120700"/>
+            <a:off x="10564368" y="5415686"/>
+            <a:ext cx="475488" cy="281635"/>
           </a:xfrm>
           <a:prstGeom prst="rect">
             <a:avLst/>
           </a:prstGeom>
           <a:solidFill>
             <a:srgbClr val="EE6A2C"/>
+          </a:solidFill>
+          <a:ln>
+            <a:noFill/>
+          </a:ln>
+          <a:effectLst/>
+        </p:spPr>
+        <p:style>
+          <a:lnRef idx="1">
+            <a:schemeClr val="accent1"/>
+          </a:lnRef>
+          <a:fillRef idx="3">
+            <a:schemeClr val="accent1"/>
+          </a:fillRef>
+          <a:effectRef idx="2">
+            <a:schemeClr val="accent1"/>
+          </a:effectRef>
+          <a:fontRef idx="minor">
+            <a:schemeClr val="lt1"/>
+          </a:fontRef>
+        </p:style>
+        <p:txBody>
+          <a:bodyPr rtlCol="0" anchor="ctr"/>
+          <a:lstStyle/>
+          <a:p>
+            <a:pPr algn="ctr"/>
+          </a:p>
+        </p:txBody>
+      </p:sp>
+      <p:sp>
+        <p:nvSpPr>
+          <p:cNvPr id="97" name="Rectangle 96"/>
+          <p:cNvSpPr/>
+          <p:nvPr/>
+        </p:nvSpPr>
+        <p:spPr>
+          <a:xfrm>
+            <a:off x="10564368" y="5697321"/>
+            <a:ext cx="475488" cy="53644"/>
+          </a:xfrm>
+          <a:prstGeom prst="rect">
+            <a:avLst/>
+          </a:prstGeom>
+          <a:solidFill>
+            <a:srgbClr val="3E5A78"/>
+          </a:solidFill>
+          <a:ln>
+            <a:noFill/>
+          </a:ln>
+          <a:effectLst/>
+        </p:spPr>
+        <p:style>
+          <a:lnRef idx="1">
+            <a:schemeClr val="accent1"/>
+          </a:lnRef>
+          <a:fillRef idx="3">
+            <a:schemeClr val="accent1"/>
+          </a:fillRef>
+          <a:effectRef idx="2">
+            <a:schemeClr val="accent1"/>
+          </a:effectRef>
+          <a:fontRef idx="minor">
+            <a:schemeClr val="lt1"/>
+          </a:fontRef>
+        </p:style>
+        <p:txBody>
+          <a:bodyPr rtlCol="0" anchor="ctr"/>
+          <a:lstStyle/>
+          <a:p>
+            <a:pPr algn="ctr"/>
+          </a:p>
+        </p:txBody>
+      </p:sp>
+      <p:sp>
+        <p:nvSpPr>
+          <p:cNvPr id="98" name="Rectangle 97"/>
+          <p:cNvSpPr/>
+          <p:nvPr/>
+        </p:nvSpPr>
+        <p:spPr>
+          <a:xfrm>
+            <a:off x="10564368" y="5750966"/>
+            <a:ext cx="475488" cy="40233"/>
+          </a:xfrm>
+          <a:prstGeom prst="rect">
+            <a:avLst/>
+          </a:prstGeom>
+          <a:solidFill>
+            <a:srgbClr val="A09278"/>
           </a:solidFill>
           <a:ln>
             <a:noFill/>

--- a/rapports/septembre/Pour_de_Bon_sept2026.pptx
+++ b/rapports/septembre/Pour_de_Bon_sept2026.pptx
@@ -6250,13 +6250,13 @@
           <a:p>
             <a:pPr algn="l"/>
             <a:r>
-              <a:rPr sz="1000" b="0" i="0">
+              <a:rPr sz="800" b="0" i="0">
                 <a:solidFill>
                   <a:srgbClr val="111111"/>
                 </a:solidFill>
                 <a:latin typeface="Arial"/>
               </a:rPr>
-              <a:t>Viandes, volailles et charcuterie</a:t>
+              <a:t>Viandes, volailles et charcuterie · 19 %</a:t>
             </a:r>
           </a:p>
         </p:txBody>
@@ -6335,7 +6335,7 @@
                 </a:solidFill>
                 <a:latin typeface="Arial"/>
               </a:rPr>
-              <a:t>Champagnes, vins et cadeaux · 22 %</a:t>
+              <a:t>Champagnes, vins et cadeaux · 31 %</a:t>
             </a:r>
           </a:p>
         </p:txBody>
@@ -6414,7 +6414,7 @@
                 </a:solidFill>
                 <a:latin typeface="Arial"/>
               </a:rPr>
-              <a:t>Poissons et produits de la mer · 21 %</a:t>
+              <a:t>Poissons et produits de la mer · 18 %</a:t>
             </a:r>
           </a:p>
         </p:txBody>
@@ -6493,7 +6493,7 @@
                 </a:solidFill>
                 <a:latin typeface="Arial"/>
               </a:rPr>
-              <a:t>Fromages et produits laitiers · 21 %</a:t>
+              <a:t>Fromages et produits laitiers · 16 %</a:t>
             </a:r>
           </a:p>
         </p:txBody>
@@ -6572,7 +6572,7 @@
                 </a:solidFill>
                 <a:latin typeface="Arial"/>
               </a:rPr>
-              <a:t>Épicerie sucrée et miel · 4 %</a:t>
+              <a:t>Épicerie sucrée et miel · 11 %</a:t>
             </a:r>
           </a:p>
         </p:txBody>
@@ -6651,7 +6651,7 @@
                 </a:solidFill>
                 <a:latin typeface="Arial"/>
               </a:rPr>
-              <a:t>Plats préparés et spécialités · 3 %</a:t>
+              <a:t>Plats préparés et spécialités · 5 %</a:t>
             </a:r>
           </a:p>
         </p:txBody>
@@ -6665,7 +6665,7 @@
         <p:spPr>
           <a:xfrm>
             <a:off x="10564368" y="4450080"/>
-            <a:ext cx="475488" cy="388924"/>
+            <a:ext cx="475488" cy="254812"/>
           </a:xfrm>
           <a:prstGeom prst="rect">
             <a:avLst/>
@@ -6702,49 +6702,14 @@
       </p:sp>
       <p:sp>
         <p:nvSpPr>
-          <p:cNvPr id="93" name="TextBox 92"/>
-          <p:cNvSpPr txBox="1"/>
-          <p:nvPr/>
-        </p:nvSpPr>
-        <p:spPr>
-          <a:xfrm>
-            <a:off x="10564368" y="4450080"/>
-            <a:ext cx="475488" cy="388924"/>
-          </a:xfrm>
-          <a:prstGeom prst="rect">
-            <a:avLst/>
-          </a:prstGeom>
-          <a:noFill/>
-        </p:spPr>
-        <p:txBody>
-          <a:bodyPr wrap="square" anchor="ctr" lIns="0" rIns="0" tIns="0" bIns="0">
-            <a:spAutoFit/>
-          </a:bodyPr>
-          <a:lstStyle/>
-          <a:p>
-            <a:pPr algn="ctr"/>
-            <a:r>
-              <a:rPr sz="1000" b="1" i="0">
-                <a:solidFill>
-                  <a:srgbClr val="FFFFFF"/>
-                </a:solidFill>
-                <a:latin typeface="Arial"/>
-              </a:rPr>
-              <a:t>29 %</a:t>
-            </a:r>
-          </a:p>
-        </p:txBody>
-      </p:sp>
-      <p:sp>
-        <p:nvSpPr>
-          <p:cNvPr id="94" name="Rectangle 93"/>
+          <p:cNvPr id="93" name="Rectangle 92"/>
           <p:cNvSpPr/>
           <p:nvPr/>
         </p:nvSpPr>
         <p:spPr>
           <a:xfrm>
-            <a:off x="10564368" y="4839004"/>
-            <a:ext cx="475488" cy="295046"/>
+            <a:off x="10564368" y="4704892"/>
+            <a:ext cx="475488" cy="415747"/>
           </a:xfrm>
           <a:prstGeom prst="rect">
             <a:avLst/>
@@ -6781,14 +6746,49 @@
       </p:sp>
       <p:sp>
         <p:nvSpPr>
+          <p:cNvPr id="94" name="TextBox 93"/>
+          <p:cNvSpPr txBox="1"/>
+          <p:nvPr/>
+        </p:nvSpPr>
+        <p:spPr>
+          <a:xfrm>
+            <a:off x="10564368" y="4704892"/>
+            <a:ext cx="475488" cy="415747"/>
+          </a:xfrm>
+          <a:prstGeom prst="rect">
+            <a:avLst/>
+          </a:prstGeom>
+          <a:noFill/>
+        </p:spPr>
+        <p:txBody>
+          <a:bodyPr wrap="square" anchor="ctr" lIns="0" rIns="0" tIns="0" bIns="0">
+            <a:spAutoFit/>
+          </a:bodyPr>
+          <a:lstStyle/>
+          <a:p>
+            <a:pPr algn="ctr"/>
+            <a:r>
+              <a:rPr sz="1000" b="1" i="0">
+                <a:solidFill>
+                  <a:srgbClr val="FFFFFF"/>
+                </a:solidFill>
+                <a:latin typeface="Arial"/>
+              </a:rPr>
+              <a:t>31 %</a:t>
+            </a:r>
+          </a:p>
+        </p:txBody>
+      </p:sp>
+      <p:sp>
+        <p:nvSpPr>
           <p:cNvPr id="95" name="Rectangle 94"/>
           <p:cNvSpPr/>
           <p:nvPr/>
         </p:nvSpPr>
         <p:spPr>
           <a:xfrm>
-            <a:off x="10564368" y="5134051"/>
-            <a:ext cx="475488" cy="281635"/>
+            <a:off x="10564368" y="5120640"/>
+            <a:ext cx="475488" cy="241401"/>
           </a:xfrm>
           <a:prstGeom prst="rect">
             <a:avLst/>
@@ -6831,8 +6831,8 @@
         </p:nvSpPr>
         <p:spPr>
           <a:xfrm>
-            <a:off x="10564368" y="5415686"/>
-            <a:ext cx="475488" cy="281635"/>
+            <a:off x="10564368" y="5362041"/>
+            <a:ext cx="475488" cy="214579"/>
           </a:xfrm>
           <a:prstGeom prst="rect">
             <a:avLst/>
@@ -6875,8 +6875,8 @@
         </p:nvSpPr>
         <p:spPr>
           <a:xfrm>
-            <a:off x="10564368" y="5697321"/>
-            <a:ext cx="475488" cy="53644"/>
+            <a:off x="10564368" y="5576620"/>
+            <a:ext cx="475488" cy="147523"/>
           </a:xfrm>
           <a:prstGeom prst="rect">
             <a:avLst/>
@@ -6919,8 +6919,8 @@
         </p:nvSpPr>
         <p:spPr>
           <a:xfrm>
-            <a:off x="10564368" y="5750966"/>
-            <a:ext cx="475488" cy="40233"/>
+            <a:off x="10564368" y="5724144"/>
+            <a:ext cx="475488" cy="67056"/>
           </a:xfrm>
           <a:prstGeom prst="rect">
             <a:avLst/>
@@ -7356,7 +7356,7 @@
                 </a:solidFill>
                 <a:latin typeface="Arial"/>
               </a:rPr>
-              <a:t>Prouver la qualité des ingrédients</a:t>
+              <a:t>Mettre en avant les coffrets cadeaux</a:t>
             </a:r>
           </a:p>
         </p:txBody>
@@ -7391,7 +7391,7 @@
                 </a:solidFill>
                 <a:latin typeface="Arial"/>
               </a:rPr>
-              <a:t>La composition et les ingrédients sont le premier frein (30,4 %), devant le doute sur l'utilité réelle (22,6 %) : l'audience lit les étiquettes et se méfie des mentions marketing.</a:t>
+              <a:t>Le coffret Champagne et Safran atteint 1,96 fois le CTR moyen, le meilleur score du mois.</a:t>
             </a:r>
           </a:p>
         </p:txBody>
@@ -7426,7 +7426,7 @@
                 </a:solidFill>
                 <a:latin typeface="Arial"/>
               </a:rPr>
-              <a:t>→  Mettre en avant l'origine, la liste courte d'ingrédients et le savoir-faire artisanal de chaque produit.</a:t>
+              <a:t>→  Préparer les coffrets cadeaux pour les fêtes de fin d'année.</a:t>
             </a:r>
           </a:p>
         </p:txBody>
@@ -7542,7 +7542,7 @@
                 </a:solidFill>
                 <a:latin typeface="Arial"/>
               </a:rPr>
-              <a:t>Lever le frein du prix et de la livraison</a:t>
+              <a:t>Les légumes de saison et les fromages cliquent bien</a:t>
             </a:r>
           </a:p>
         </p:txBody>
@@ -7577,7 +7577,7 @@
                 </a:solidFill>
                 <a:latin typeface="Arial"/>
               </a:rPr>
-              <a:t>Le prix (14,2 %) et la livraison (13,3 %) suivent : l'audience veut savoir où acheter en ligne et à quel coût.</a:t>
+              <a:t>Les légumes de saison atteignent 1,42 fois la moyenne, le comté 12 mois AOP 1,24 fois.</a:t>
             </a:r>
           </a:p>
         </p:txBody>
@@ -7612,7 +7612,7 @@
                 </a:solidFill>
                 <a:latin typeface="Arial"/>
               </a:rPr>
-              <a:t>→  Afficher les conditions de livraison et un panier découverte dans l'accroche.</a:t>
+              <a:t>→  Associer chaque produit à son producteur et à sa saison.</a:t>
             </a:r>
           </a:p>
         </p:txBody>
@@ -7728,7 +7728,7 @@
                 </a:solidFill>
                 <a:latin typeface="Arial"/>
               </a:rPr>
-              <a:t>Exister face à Picard</a:t>
+              <a:t>Revoir les poissons et fruits de mer</a:t>
             </a:r>
           </a:p>
         </p:txBody>
@@ -7763,7 +7763,7 @@
                 </a:solidFill>
                 <a:latin typeface="Arial"/>
               </a:rPr>
-              <a:t>Pour de Bon pèse 2,9 % de part de voix (+1,0 pt, 6e), Picard 66,2 %. Les IA ne citent pas encore spontanément Pour de Bon (&lt; 0,1 %). Côté ads : 14,7 % (+1,2 pt).</a:t>
+              <a:t>Les poissons et fruits de mer restent à 0,52 fois la moyenne (huîtres gratinées 0,44 fois, saumon au miel 0,46 fois), alors qu'ils représentent 14 % de la diffusion.</a:t>
             </a:r>
           </a:p>
         </p:txBody>
@@ -7798,7 +7798,7 @@
                 </a:solidFill>
                 <a:latin typeface="Arial"/>
               </a:rPr>
-              <a:t>→  Maintenir la présence ads et développer des contenus (recettes, guides produits) pour être recommandé.</a:t>
+              <a:t>→  Réduire leur part ou les présenter comme une idée de repas de fête.</a:t>
             </a:r>
           </a:p>
         </p:txBody>
@@ -7949,7 +7949,7 @@
                 </a:solidFill>
                 <a:latin typeface="Arial"/>
               </a:rPr>
-              <a:t>Les impressions baissent de 31 %, mais les clics progressent de 32 %. Le CTR passe de 0,25 % à 0,48 %.</a:t>
+              <a:t>Les impressions baissent de 31 % mais les clics progressent de 32 %. Le CTR passe de 0,25 % à 0,48 %.</a:t>
             </a:r>
           </a:p>
         </p:txBody>
@@ -7984,7 +7984,7 @@
                 </a:solidFill>
                 <a:latin typeface="Arial"/>
               </a:rPr>
-              <a:t>→  Prolonger le ciblage resserré et tester des accroches recettes de saison.</a:t>
+              <a:t>→  Prolonger le ciblage resserré.</a:t>
             </a:r>
           </a:p>
         </p:txBody>
